--- a/public/fun/pack/pptx/familypro/가족소개프리미엄_18_3대가족_아쿠아스틸.pptx
+++ b/public/fun/pack/pptx/familypro/가족소개프리미엄_18_3대가족_아쿠아스틸.pptx
@@ -113,12 +113,12 @@
   <p:extLst>
     <p:ext uri="{521415D9-36F7-43E2-AB2F-B90AF26B5E84}">
       <p14:sectionLst xmlns:p14="http://schemas.microsoft.com/office/powerpoint/2010/main">
-        <p14:section name="시작" id="{9F17809F-C1E0-43A4-9FAF-A6343C0F49FF}">
+        <p14:section name="시작" id="{EF846C4E-8A21-4564-AA5F-1F1780DC922C}">
           <p14:sldIdLst>
             <p14:sldId id="256"/>
           </p14:sldIdLst>
         </p14:section>
-        <p14:section name="본문" id="{FF59CE7D-E359-42A3-B9DE-45A3A4077B84}">
+        <p14:section name="본문" id="{30D9130A-672A-4A6A-A524-5FBB63FCB867}">
           <p14:sldIdLst>
             <p14:sldId id="257"/>
             <p14:sldId id="258"/>
@@ -127,7 +127,7 @@
             <p14:sldId id="261"/>
           </p14:sldIdLst>
         </p14:section>
-        <p14:section name="마무리" id="{E6C5E9F8-92AC-4C79-8DF6-389814D6BC74}">
+        <p14:section name="마무리" id="{BD395F2F-0DB3-45E2-80A1-27EF2C7579A1}">
           <p14:sldIdLst>
             <p14:sldId id="262"/>
           </p14:sldIdLst>
@@ -1561,7 +1561,7 @@
             </a:lvl1pPr>
           </a:lstStyle>
           <a:p>
-            <a:fld id="{191ED6FC-B243-4223-AF8C-828B12E2CA39}" type="slidenum">
+            <a:fld id="{E61E0A52-7D47-444C-9D4C-2BBEE608F9B9}" type="slidenum">
               <a:rPr lang="en-US"/>
               <a:t>‹#›</a:t>
             </a:fld>
@@ -2271,7 +2271,7 @@
             </a:lvl1pPr>
           </a:lstStyle>
           <a:p>
-            <a:fld id="{A6C5C7F6-42D7-433A-827D-C371A917921F}" type="slidenum">
+            <a:fld id="{E79C02E5-0903-4E67-9D83-5DF70A9F7056}" type="slidenum">
               <a:rPr lang="en-US"/>
               <a:t>‹#›</a:t>
             </a:fld>
@@ -2941,7 +2941,7 @@
             </a:lvl1pPr>
           </a:lstStyle>
           <a:p>
-            <a:fld id="{DE34FA77-F3E0-44BD-A975-0CE166B7D7A5}" type="slidenum">
+            <a:fld id="{76B36E58-7369-4197-9BCF-FBD8BD10ADF6}" type="slidenum">
               <a:rPr lang="en-US"/>
               <a:t>‹#›</a:t>
             </a:fld>
@@ -3782,7 +3782,7 @@
           <a:p>
             <a:r>
               <a:rPr lang="ko-KR"/>
-              <a:t>바닷가 등대까지 걸어간 여름휴가</a:t>
+              <a:t>바닷가 등대까지 걸어간 휴가</a:t>
             </a:r>
           </a:p>
         </p:txBody>
@@ -3804,7 +3804,7 @@
           <a:p>
             <a:r>
               <a:rPr lang="ko-KR"/>
-              <a:t>3대 가족 · 0000. 00. 00</a:t>
+              <a:t>3대 가족 · 날짜 입력</a:t>
             </a:r>
           </a:p>
         </p:txBody>
@@ -4303,7 +4303,7 @@
           <a:bodyPr/>
           <a:lstStyle/>
           <a:p>
-            <a:fld id="{20DD6DF7-33F2-4C43-8133-AC3C3BC13A95}" type="slidenum">
+            <a:fld id="{FDF26B0F-95F3-4AFC-9E07-F8C4D5F9B3C9}" type="slidenum">
               <a:rPr lang="en-US"/>
               <a:t>‹#›</a:t>
             </a:fld>
@@ -5351,7 +5351,7 @@
           <a:bodyPr/>
           <a:lstStyle/>
           <a:p>
-            <a:fld id="{4A7D2C4B-392A-490C-986B-8F395533F1A9}" type="slidenum">
+            <a:fld id="{15C64CAA-20A6-4BA9-8703-1E38584AB262}" type="slidenum">
               <a:rPr lang="en-US"/>
               <a:t>‹#›</a:t>
             </a:fld>
@@ -6326,7 +6326,7 @@
           <a:bodyPr/>
           <a:lstStyle/>
           <a:p>
-            <a:fld id="{02D453D9-0627-4802-907A-95679F337FCB}" type="slidenum">
+            <a:fld id="{6D4957BF-952E-456C-972F-B1A64DD8BAC8}" type="slidenum">
               <a:rPr lang="en-US"/>
               <a:t>‹#›</a:t>
             </a:fld>
@@ -7611,7 +7611,7 @@
           <a:bodyPr/>
           <a:lstStyle/>
           <a:p>
-            <a:fld id="{ADE62CFF-3EDE-4B66-94BA-8D2933FD6A10}" type="slidenum">
+            <a:fld id="{80986CB4-0B23-4D7C-9DFA-25DBCC3133C6}" type="slidenum">
               <a:rPr lang="en-US"/>
               <a:t>‹#›</a:t>
             </a:fld>
@@ -7699,7 +7699,7 @@
           <a:bodyPr/>
           <a:lstStyle/>
           <a:p>
-            <a:fld id="{9C913225-F308-42EF-B7F5-8880582C3F8E}" type="slidenum">
+            <a:fld id="{02D5A8D0-5CBB-4F78-9E9E-784D98652B12}" type="slidenum">
               <a:rPr lang="en-US"/>
               <a:t>‹#›</a:t>
             </a:fld>
